--- a/ゲーム科2年/01_後期/ゲームプログラミング応用Ⅰ/03_ピクセルシェーダー.pptx
+++ b/ゲーム科2年/01_後期/ゲームプログラミング応用Ⅰ/03_ピクセルシェーダー.pptx
@@ -264,7 +264,7 @@
           <a:p>
             <a:fld id="{E9CC885B-4903-4D54-9A93-00025F12DED9}" type="datetimeFigureOut">
               <a:rPr kumimoji="1" lang="ja-JP" altLang="en-US" smtClean="0"/>
-              <a:t>2025/7/15</a:t>
+              <a:t>2025/7/16</a:t>
             </a:fld>
             <a:endParaRPr kumimoji="1" lang="ja-JP" altLang="en-US"/>
           </a:p>
@@ -494,7 +494,7 @@
           <a:p>
             <a:fld id="{E9CC885B-4903-4D54-9A93-00025F12DED9}" type="datetimeFigureOut">
               <a:rPr kumimoji="1" lang="ja-JP" altLang="en-US" smtClean="0"/>
-              <a:t>2025/7/15</a:t>
+              <a:t>2025/7/16</a:t>
             </a:fld>
             <a:endParaRPr kumimoji="1" lang="ja-JP" altLang="en-US"/>
           </a:p>
@@ -734,7 +734,7 @@
           <a:p>
             <a:fld id="{E9CC885B-4903-4D54-9A93-00025F12DED9}" type="datetimeFigureOut">
               <a:rPr kumimoji="1" lang="ja-JP" altLang="en-US" smtClean="0"/>
-              <a:t>2025/7/15</a:t>
+              <a:t>2025/7/16</a:t>
             </a:fld>
             <a:endParaRPr kumimoji="1" lang="ja-JP" altLang="en-US"/>
           </a:p>
@@ -964,7 +964,7 @@
           <a:p>
             <a:fld id="{E9CC885B-4903-4D54-9A93-00025F12DED9}" type="datetimeFigureOut">
               <a:rPr kumimoji="1" lang="ja-JP" altLang="en-US" smtClean="0"/>
-              <a:t>2025/7/15</a:t>
+              <a:t>2025/7/16</a:t>
             </a:fld>
             <a:endParaRPr kumimoji="1" lang="ja-JP" altLang="en-US"/>
           </a:p>
@@ -1239,7 +1239,7 @@
           <a:p>
             <a:fld id="{E9CC885B-4903-4D54-9A93-00025F12DED9}" type="datetimeFigureOut">
               <a:rPr kumimoji="1" lang="ja-JP" altLang="en-US" smtClean="0"/>
-              <a:t>2025/7/15</a:t>
+              <a:t>2025/7/16</a:t>
             </a:fld>
             <a:endParaRPr kumimoji="1" lang="ja-JP" altLang="en-US"/>
           </a:p>
@@ -1568,7 +1568,7 @@
           <a:p>
             <a:fld id="{E9CC885B-4903-4D54-9A93-00025F12DED9}" type="datetimeFigureOut">
               <a:rPr kumimoji="1" lang="ja-JP" altLang="en-US" smtClean="0"/>
-              <a:t>2025/7/15</a:t>
+              <a:t>2025/7/16</a:t>
             </a:fld>
             <a:endParaRPr kumimoji="1" lang="ja-JP" altLang="en-US"/>
           </a:p>
@@ -2044,7 +2044,7 @@
           <a:p>
             <a:fld id="{E9CC885B-4903-4D54-9A93-00025F12DED9}" type="datetimeFigureOut">
               <a:rPr kumimoji="1" lang="ja-JP" altLang="en-US" smtClean="0"/>
-              <a:t>2025/7/15</a:t>
+              <a:t>2025/7/16</a:t>
             </a:fld>
             <a:endParaRPr kumimoji="1" lang="ja-JP" altLang="en-US"/>
           </a:p>
@@ -2185,7 +2185,7 @@
           <a:p>
             <a:fld id="{E9CC885B-4903-4D54-9A93-00025F12DED9}" type="datetimeFigureOut">
               <a:rPr kumimoji="1" lang="ja-JP" altLang="en-US" smtClean="0"/>
-              <a:t>2025/7/15</a:t>
+              <a:t>2025/7/16</a:t>
             </a:fld>
             <a:endParaRPr kumimoji="1" lang="ja-JP" altLang="en-US"/>
           </a:p>
@@ -2298,7 +2298,7 @@
           <a:p>
             <a:fld id="{E9CC885B-4903-4D54-9A93-00025F12DED9}" type="datetimeFigureOut">
               <a:rPr kumimoji="1" lang="ja-JP" altLang="en-US" smtClean="0"/>
-              <a:t>2025/7/15</a:t>
+              <a:t>2025/7/16</a:t>
             </a:fld>
             <a:endParaRPr kumimoji="1" lang="ja-JP" altLang="en-US"/>
           </a:p>
@@ -2641,7 +2641,7 @@
           <a:p>
             <a:fld id="{E9CC885B-4903-4D54-9A93-00025F12DED9}" type="datetimeFigureOut">
               <a:rPr kumimoji="1" lang="ja-JP" altLang="en-US" smtClean="0"/>
-              <a:t>2025/7/15</a:t>
+              <a:t>2025/7/16</a:t>
             </a:fld>
             <a:endParaRPr kumimoji="1" lang="ja-JP" altLang="en-US"/>
           </a:p>
@@ -2929,7 +2929,7 @@
           <a:p>
             <a:fld id="{E9CC885B-4903-4D54-9A93-00025F12DED9}" type="datetimeFigureOut">
               <a:rPr kumimoji="1" lang="ja-JP" altLang="en-US" smtClean="0"/>
-              <a:t>2025/7/15</a:t>
+              <a:t>2025/7/16</a:t>
             </a:fld>
             <a:endParaRPr kumimoji="1" lang="ja-JP" altLang="en-US"/>
           </a:p>
@@ -3202,7 +3202,7 @@
           <a:p>
             <a:fld id="{E9CC885B-4903-4D54-9A93-00025F12DED9}" type="datetimeFigureOut">
               <a:rPr kumimoji="1" lang="ja-JP" altLang="en-US" smtClean="0"/>
-              <a:t>2025/7/15</a:t>
+              <a:t>2025/7/16</a:t>
             </a:fld>
             <a:endParaRPr kumimoji="1" lang="ja-JP" altLang="en-US"/>
           </a:p>
@@ -4898,7 +4898,15 @@
             </a:r>
             <a:r>
               <a:rPr lang="ja-JP" altLang="en-US" sz="2400" dirty="0"/>
-              <a:t>とは別で計算してくれます。</a:t>
+              <a:t>とは</a:t>
+            </a:r>
+            <a:r>
+              <a:rPr lang="ja-JP" altLang="en-US" sz="2400"/>
+              <a:t>別で処理して</a:t>
+            </a:r>
+            <a:r>
+              <a:rPr lang="ja-JP" altLang="en-US" sz="2400" dirty="0"/>
+              <a:t>くれます。</a:t>
             </a:r>
             <a:endParaRPr lang="en-US" altLang="ja-JP" sz="2400" dirty="0"/>
           </a:p>
